--- a/Ascension_ppt.pptx
+++ b/Ascension_ppt.pptx
@@ -9340,36 +9340,6 @@
           </a:fontRef>
         </p:style>
       </p:cxnSp>
-      <p:pic>
-        <p:nvPicPr>
-          <p:cNvPr id="4" name="Tartalom helye 3" descr="A képen képernyőkép, szöveg, Emberi arc, zene látható&#10;&#10;Lehet, hogy az AI által létrehozott tartalom helytelen.">
-            <a:extLst>
-              <a:ext uri="{FF2B5EF4-FFF2-40B4-BE49-F238E27FC236}">
-                <a16:creationId xmlns:a16="http://schemas.microsoft.com/office/drawing/2014/main" id="{4307A841-D971-8644-3B17-B2E46964CF53}"/>
-              </a:ext>
-            </a:extLst>
-          </p:cNvPr>
-          <p:cNvPicPr>
-            <a:picLocks noChangeAspect="1"/>
-          </p:cNvPicPr>
-          <p:nvPr/>
-        </p:nvPicPr>
-        <p:blipFill>
-          <a:blip r:embed="rId2"/>
-          <a:stretch>
-            <a:fillRect/>
-          </a:stretch>
-        </p:blipFill>
-        <p:spPr>
-          <a:xfrm>
-            <a:off x="704048" y="2345395"/>
-            <a:ext cx="5549902" cy="3260566"/>
-          </a:xfrm>
-          <a:prstGeom prst="rect">
-            <a:avLst/>
-          </a:prstGeom>
-        </p:spPr>
-      </p:pic>
       <p:sp>
         <p:nvSpPr>
           <p:cNvPr id="8" name="Content Placeholder 7">
@@ -10033,6 +10003,36 @@
           </a:p>
         </p:txBody>
       </p:sp>
+      <p:pic>
+        <p:nvPicPr>
+          <p:cNvPr id="7" name="Kép 6">
+            <a:extLst>
+              <a:ext uri="{FF2B5EF4-FFF2-40B4-BE49-F238E27FC236}">
+                <a16:creationId xmlns:a16="http://schemas.microsoft.com/office/drawing/2014/main" id="{5C9F6054-A8EE-220D-4218-2F22BE361BF9}"/>
+              </a:ext>
+            </a:extLst>
+          </p:cNvPr>
+          <p:cNvPicPr>
+            <a:picLocks noChangeAspect="1"/>
+          </p:cNvPicPr>
+          <p:nvPr/>
+        </p:nvPicPr>
+        <p:blipFill>
+          <a:blip r:embed="rId2"/>
+          <a:stretch>
+            <a:fillRect/>
+          </a:stretch>
+        </p:blipFill>
+        <p:spPr>
+          <a:xfrm>
+            <a:off x="259793" y="2094610"/>
+            <a:ext cx="6405167" cy="3630781"/>
+          </a:xfrm>
+          <a:prstGeom prst="rect">
+            <a:avLst/>
+          </a:prstGeom>
+        </p:spPr>
+      </p:pic>
     </p:spTree>
     <p:extLst>
       <p:ext uri="{BB962C8B-B14F-4D97-AF65-F5344CB8AC3E}">
